--- a/media/exports/reports/2026-02/people-helped.pptx
+++ b/media/exports/reports/2026-02/people-helped.pptx
@@ -973,7 +973,7 @@
           <a:lstStyle/>
           <a:p>
             <a:r>
-              <a:t>How many people did we help this month, and how many couldn't we reach?. Sample Community Services Ltd. Period: February 2026. In short: 396 people helped in February; 43 couldn't be reached (90.2% reached, target 90.0%). People helped by each program, day by day, and the people who came to a program but couldn't be helped (and why). People helped are counted against each program's own grant spend.</a:t>
+              <a:t>How many people did you help this month, and how many couldn't you reach?. Sample Community Services Ltd. Period: February 2026. In short: 396 people helped in February; 43 couldn't be reached (90.2% reached, target 90.0%). People helped by each program, day by day, and the people who came to a program but couldn't be helped (and why). People helped are counted against each program's own grant spend.</a:t>
             </a:r>
           </a:p>
         </p:txBody>
@@ -1043,7 +1043,7 @@
           <a:lstStyle/>
           <a:p>
             <a:r>
-              <a:t>How many people did we help this month, and how many couldn't we reach?. People helped, February: 396; Couldn't reach, February: 43; Share reached, February: 90.2%. 396 people were helped in February, and 43 came to a program but couldn't be helped: 90.2% reached (target 90.0%), against 89.7% in January. Community meals reached the smallest share: 89.8% (16 couldn't be helped). The main reason: program at capacity (19 people).</a:t>
+              <a:t>How many people did you help this month, and how many couldn't you reach?. People helped, February: 396; Couldn't reach, February: 43; Share reached, February: 90.2%. 396 people were helped in February, and 43 came to a program but couldn't be helped: 90.2% reached (target 90.0%), against 89.7% in January. Community meals reached the smallest share: 89.8% (16 couldn't be helped). The main reason: program at capacity (19 people).</a:t>
             </a:r>
           </a:p>
         </p:txBody>
@@ -4221,7 +4221,7 @@
                 </a:solidFill>
                 <a:latin typeface="Roboto"/>
               </a:rPr>
-              <a:t>How many people did we help this month, and how many couldn't we reach?</a:t>
+              <a:t>How many people did you help this month, and how many couldn't you reach?</a:t>
             </a:r>
           </a:p>
         </p:txBody>
@@ -4488,39 +4488,7 @@
                 </a:solidFill>
                 <a:latin typeface="Roboto"/>
               </a:rPr>
-              <a:t>January 2026: Locked. January 2026 is locked (closed 3 Feb 2026). These numbers won't change.</a:t>
-            </a:r>
-          </a:p>
-          <a:p>
-            <a:pPr>
-              <a:defRPr>
-                <a:latin typeface="Roboto"/>
-              </a:defRPr>
-            </a:pPr>
-            <a:r>
-              <a:rPr sz="1100" b="0">
-                <a:solidFill>
-                  <a:srgbClr val="5F6F63"/>
-                </a:solidFill>
-                <a:latin typeface="Roboto"/>
-              </a:rPr>
               <a:t>February 2026: Locked. February 2026 is locked (closed 3 Mar 2026). These numbers won't change.</a:t>
-            </a:r>
-          </a:p>
-          <a:p>
-            <a:pPr>
-              <a:defRPr>
-                <a:latin typeface="Roboto"/>
-              </a:defRPr>
-            </a:pPr>
-            <a:r>
-              <a:rPr sz="1100" b="0">
-                <a:solidFill>
-                  <a:srgbClr val="5F6F63"/>
-                </a:solidFill>
-                <a:latin typeface="Roboto"/>
-              </a:rPr>
-              <a:t>October 2026: Incomplete. October 2026 is still in progress: figures to 6 Oct only.</a:t>
             </a:r>
           </a:p>
         </p:txBody>
@@ -4598,7 +4566,7 @@
                 </a:solidFill>
                 <a:latin typeface="Roboto"/>
               </a:rPr>
-              <a:t>Data retrieved 2pm, Tue 6 Oct 2026 · Generated 10 Oct 2026, 9:55pm · Sample data · Made with Python (python-pptx)</a:t>
+              <a:t>Data retrieved 2pm, Tue 6 Oct 2026 · Generated 22 Oct 2026, 4:57pm · Sample data · Made with Python (python-pptx)</a:t>
             </a:r>
           </a:p>
         </p:txBody>
@@ -4692,7 +4660,7 @@
                 </a:solidFill>
                 <a:latin typeface="Roboto"/>
               </a:rPr>
-              <a:t>How many people did we help this month, and how many couldn't we reach?</a:t>
+              <a:t>How many people did you help this month, and how many couldn't you reach?</a:t>
             </a:r>
           </a:p>
         </p:txBody>
@@ -4778,7 +4746,7 @@
                 </a:solidFill>
                 <a:latin typeface="Roboto"/>
               </a:rPr>
-              <a:t>Sample Community Services Ltd · How many people did we help this month, and how many couldn't we reach?</a:t>
+              <a:t>Sample Community Services Ltd · How many people did you help this month, and how many couldn't you reach?</a:t>
             </a:r>
           </a:p>
         </p:txBody>
@@ -5740,7 +5708,7 @@
                 </a:solidFill>
                 <a:latin typeface="Roboto"/>
               </a:rPr>
-              <a:t>Data retrieved 2pm, Tue 6 Oct 2026 · Generated 10 Oct 2026, 9:55pm · Sample data · Made with Python (python-pptx)</a:t>
+              <a:t>Data retrieved 2pm, Tue 6 Oct 2026 · Generated 22 Oct 2026, 4:57pm · Sample data · Made with Python (python-pptx)</a:t>
             </a:r>
           </a:p>
         </p:txBody>
@@ -5920,7 +5888,7 @@
                 </a:solidFill>
                 <a:latin typeface="Roboto"/>
               </a:rPr>
-              <a:t>Sample Community Services Ltd · How many people did we help this month, and how many couldn't we reach?</a:t>
+              <a:t>Sample Community Services Ltd · How many people did you help this month, and how many couldn't you reach?</a:t>
             </a:r>
           </a:p>
         </p:txBody>
@@ -6055,7 +6023,7 @@
                 </a:solidFill>
                 <a:latin typeface="Roboto"/>
               </a:rPr>
-              <a:t>Data retrieved 2pm, Tue 6 Oct 2026 · Generated 10 Oct 2026, 9:55pm · Sample data · Made with Python (python-pptx)</a:t>
+              <a:t>Data retrieved 2pm, Tue 6 Oct 2026 · Generated 22 Oct 2026, 4:57pm · Sample data · Made with Python (python-pptx)</a:t>
             </a:r>
           </a:p>
         </p:txBody>
@@ -6235,7 +6203,7 @@
                 </a:solidFill>
                 <a:latin typeface="Roboto"/>
               </a:rPr>
-              <a:t>Sample Community Services Ltd · How many people did we help this month, and how many couldn't we reach?</a:t>
+              <a:t>Sample Community Services Ltd · How many people did you help this month, and how many couldn't you reach?</a:t>
             </a:r>
           </a:p>
         </p:txBody>
@@ -6675,7 +6643,7 @@
                 </a:solidFill>
                 <a:latin typeface="Roboto"/>
               </a:rPr>
-              <a:t>Data retrieved 2pm, Tue 6 Oct 2026 · Generated 10 Oct 2026, 9:55pm · Sample data · Made with Python (python-pptx)</a:t>
+              <a:t>Data retrieved 2pm, Tue 6 Oct 2026 · Generated 22 Oct 2026, 4:57pm · Sample data · Made with Python (python-pptx)</a:t>
             </a:r>
           </a:p>
         </p:txBody>

--- a/media/exports/reports/2026-02/people-helped.pptx
+++ b/media/exports/reports/2026-02/people-helped.pptx
@@ -4226,62 +4226,30 @@
           </a:p>
         </p:txBody>
       </p:sp>
-      <p:sp>
-        <p:nvSpPr>
-          <p:cNvPr id="3" name="Rectangle 2"/>
-          <p:cNvSpPr/>
+      <p:pic>
+        <p:nvPicPr>
+          <p:cNvPr id="3" name="Picture 2" descr="mark-4th-180.png"/>
+          <p:cNvPicPr>
+            <a:picLocks noChangeAspect="1"/>
+          </p:cNvPicPr>
           <p:nvPr/>
-        </p:nvSpPr>
-        <p:spPr>
-          <a:xfrm>
-            <a:off x="457200" y="548640"/>
-            <a:ext cx="640080" cy="640080"/>
+        </p:nvPicPr>
+        <p:blipFill>
+          <a:blip r:embed="rId2"/>
+          <a:stretch>
+            <a:fillRect/>
+          </a:stretch>
+        </p:blipFill>
+        <p:spPr>
+          <a:xfrm>
+            <a:off x="365760" y="457200"/>
+            <a:ext cx="822960" cy="822960"/>
           </a:xfrm>
           <a:prstGeom prst="rect">
             <a:avLst/>
           </a:prstGeom>
-          <a:solidFill>
-            <a:srgbClr val="2F7A5D"/>
-          </a:solidFill>
-          <a:ln>
-            <a:noFill/>
-          </a:ln>
-        </p:spPr>
-        <p:style>
-          <a:lnRef idx="1">
-            <a:schemeClr val="accent1"/>
-          </a:lnRef>
-          <a:fillRef idx="3">
-            <a:schemeClr val="accent1"/>
-          </a:fillRef>
-          <a:effectRef idx="2">
-            <a:schemeClr val="accent1"/>
-          </a:effectRef>
-          <a:fontRef idx="minor">
-            <a:schemeClr val="lt1"/>
-          </a:fontRef>
-        </p:style>
-        <p:txBody>
-          <a:bodyPr rtlCol="0" anchor="ctr"/>
-          <a:lstStyle/>
-          <a:p>
-            <a:pPr>
-              <a:defRPr>
-                <a:latin typeface="Roboto"/>
-              </a:defRPr>
-            </a:pPr>
-            <a:r>
-              <a:rPr sz="1600" b="1">
-                <a:solidFill>
-                  <a:srgbClr val="FFFFFF"/>
-                </a:solidFill>
-                <a:latin typeface="Roboto"/>
-              </a:rPr>
-              <a:t>4th</a:t>
-            </a:r>
-          </a:p>
-        </p:txBody>
-      </p:sp>
+        </p:spPr>
+      </p:pic>
       <p:sp>
         <p:nvSpPr>
           <p:cNvPr id="4" name="TextBox 3"/>
@@ -4566,7 +4534,7 @@
                 </a:solidFill>
                 <a:latin typeface="Roboto"/>
               </a:rPr>
-              <a:t>Data retrieved 2pm, Tue 6 Oct 2026 · Generated 22 Oct 2026, 4:57pm · Sample data · Made with Python (python-pptx)</a:t>
+              <a:t>Data retrieved 2pm, Tue 6 Oct 2026 · Generated 28 Oct 2026, 12:45pm · Sample data · Made with Python (python-pptx)</a:t>
             </a:r>
           </a:p>
         </p:txBody>
@@ -5708,7 +5676,7 @@
                 </a:solidFill>
                 <a:latin typeface="Roboto"/>
               </a:rPr>
-              <a:t>Data retrieved 2pm, Tue 6 Oct 2026 · Generated 22 Oct 2026, 4:57pm · Sample data · Made with Python (python-pptx)</a:t>
+              <a:t>Data retrieved 2pm, Tue 6 Oct 2026 · Generated 28 Oct 2026, 12:45pm · Sample data · Made with Python (python-pptx)</a:t>
             </a:r>
           </a:p>
         </p:txBody>
@@ -6023,7 +5991,7 @@
                 </a:solidFill>
                 <a:latin typeface="Roboto"/>
               </a:rPr>
-              <a:t>Data retrieved 2pm, Tue 6 Oct 2026 · Generated 22 Oct 2026, 4:57pm · Sample data · Made with Python (python-pptx)</a:t>
+              <a:t>Data retrieved 2pm, Tue 6 Oct 2026 · Generated 28 Oct 2026, 12:45pm · Sample data · Made with Python (python-pptx)</a:t>
             </a:r>
           </a:p>
         </p:txBody>
@@ -6643,7 +6611,7 @@
                 </a:solidFill>
                 <a:latin typeface="Roboto"/>
               </a:rPr>
-              <a:t>Data retrieved 2pm, Tue 6 Oct 2026 · Generated 22 Oct 2026, 4:57pm · Sample data · Made with Python (python-pptx)</a:t>
+              <a:t>Data retrieved 2pm, Tue 6 Oct 2026 · Generated 28 Oct 2026, 12:45pm · Sample data · Made with Python (python-pptx)</a:t>
             </a:r>
           </a:p>
         </p:txBody>
